--- a/LIKA_Pitch_Deck.pptx
+++ b/LIKA_Pitch_Deck.pptx
@@ -1426,14 +1426,14 @@
           <a:p>
             <a:pPr algn="l"/>
             <a:r>
-              <a:rPr lang="th-TH" sz="3400" b="1" i="0" dirty="0">
+              <a:rPr lang="th-TH" sz="3800" b="1" i="0" dirty="0">
                 <a:solidFill>
                   <a:srgbClr val="e5edff"/>
                 </a:solidFill>
                 <a:latin typeface="Tahoma"/>
                 <a:cs typeface="Tahoma"/>
               </a:rPr>
-              <a:t>LIKA GeoBio-Nexus</a:t>
+              <a:t>LIKA Nexus</a:t>
             </a:r>
           </a:p>
         </p:txBody>
@@ -5280,7 +5280,7 @@
                 <a:latin typeface="Tahoma"/>
                 <a:cs typeface="Tahoma"/>
               </a:rPr>
-              <a:t>LIKA GeoBio-Nexus</a:t>
+              <a:t>LIKA Nexus</a:t>
             </a:r>
           </a:p>
         </p:txBody>
@@ -7832,7 +7832,7 @@
                 <a:latin typeface="Tahoma"/>
                 <a:cs typeface="Tahoma"/>
               </a:rPr>
-              <a:t>⭐ lika-geobio-nexus.html</a:t>
+              <a:t>⭐ lika-nexus.html</a:t>
             </a:r>
           </a:p>
         </p:txBody>

--- a/LIKA_Pitch_Deck.pptx
+++ b/LIKA_Pitch_Deck.pptx
@@ -1876,7 +1876,7 @@
                 <a:latin typeface="Tahoma"/>
                 <a:cs typeface="Tahoma"/>
               </a:rPr>
-              <a:t>https://tinyurl.com/2u452bd4</a:t>
+              <a:t>https://tinyurl.com/lika-nexus</a:t>
             </a:r>
           </a:p>
         </p:txBody>
@@ -3584,7 +3584,7 @@
                 <a:latin typeface="Tahoma"/>
                 <a:cs typeface="Tahoma"/>
               </a:rPr>
-              <a:t>https://tinyurl.com/2u452bd4</a:t>
+              <a:t>https://tinyurl.com/lika-nexus</a:t>
             </a:r>
           </a:p>
         </p:txBody>
@@ -8290,7 +8290,7 @@
                 <a:latin typeface="Tahoma"/>
                 <a:cs typeface="Tahoma"/>
               </a:rPr>
-              <a:t>tinyurl.com/2u452bd4</a:t>
+              <a:t>tinyurl.com/lika-nexus</a:t>
             </a:r>
           </a:p>
         </p:txBody>

--- a/LIKA_Pitch_Deck.pptx
+++ b/LIKA_Pitch_Deck.pptx
@@ -5328,7 +5328,7 @@
         <p:spPr>
           <a:xfrm flipH="0" flipV="0">
             <a:off x="3820000" y="3768000"/>
-            <a:ext cx="1050000" cy="0"/>
+            <a:ext cx="1050000" cy="1"/>
           </a:xfrm>
           <a:prstGeom prst="line">
             <a:avLst/>
